--- a/Jaeschke - Lee, CIS112 Final Presentation.pptx
+++ b/Jaeschke - Lee, CIS112 Final Presentation.pptx
@@ -12,9 +12,9 @@
     <p:sldId id="257" r:id="rId3"/>
     <p:sldId id="260" r:id="rId4"/>
     <p:sldId id="258" r:id="rId5"/>
-    <p:sldId id="259" r:id="rId6"/>
-    <p:sldId id="261" r:id="rId7"/>
-    <p:sldId id="262" r:id="rId8"/>
+    <p:sldId id="262" r:id="rId6"/>
+    <p:sldId id="259" r:id="rId7"/>
+    <p:sldId id="261" r:id="rId8"/>
     <p:sldId id="263" r:id="rId9"/>
   </p:sldIdLst>
   <p:sldSz cx="12192000" cy="6858000"/>
@@ -510,7 +510,10 @@
           <a:bodyPr/>
           <a:lstStyle/>
           <a:p>
-            <a:endParaRPr lang="en-US" dirty="0"/>
+            <a:r>
+              <a:rPr lang="en-US" dirty="0"/>
+              <a:t>Shaun</a:t>
+            </a:r>
           </a:p>
         </p:txBody>
       </p:sp>
@@ -531,6 +534,93 @@
           <a:p>
             <a:fld id="{2FCC0B45-05A4-487E-9942-37DBE4C1976F}" type="slidenum">
               <a:rPr lang="en-US" smtClean="0"/>
+              <a:t>1</a:t>
+            </a:fld>
+            <a:endParaRPr lang="en-US"/>
+          </a:p>
+        </p:txBody>
+      </p:sp>
+    </p:spTree>
+    <p:extLst>
+      <p:ext uri="{BB962C8B-B14F-4D97-AF65-F5344CB8AC3E}">
+        <p14:creationId xmlns:p14="http://schemas.microsoft.com/office/powerpoint/2010/main" val="743258957"/>
+      </p:ext>
+    </p:extLst>
+  </p:cSld>
+  <p:clrMapOvr>
+    <a:masterClrMapping/>
+  </p:clrMapOvr>
+</p:notes>
+</file>
+
+<file path=ppt/notesSlides/notesSlide2.xml><?xml version="1.0" encoding="utf-8"?>
+<p:notes xmlns:a="http://schemas.openxmlformats.org/drawingml/2006/main" xmlns:r="http://schemas.openxmlformats.org/officeDocument/2006/relationships" xmlns:p="http://schemas.openxmlformats.org/presentationml/2006/main">
+  <p:cSld>
+    <p:spTree>
+      <p:nvGrpSpPr>
+        <p:cNvPr id="1" name=""/>
+        <p:cNvGrpSpPr/>
+        <p:nvPr/>
+      </p:nvGrpSpPr>
+      <p:grpSpPr>
+        <a:xfrm>
+          <a:off x="0" y="0"/>
+          <a:ext cx="0" cy="0"/>
+          <a:chOff x="0" y="0"/>
+          <a:chExt cx="0" cy="0"/>
+        </a:xfrm>
+      </p:grpSpPr>
+      <p:sp>
+        <p:nvSpPr>
+          <p:cNvPr id="2" name="Slide Image Placeholder 1"/>
+          <p:cNvSpPr>
+            <a:spLocks noGrp="1" noRot="1" noChangeAspect="1"/>
+          </p:cNvSpPr>
+          <p:nvPr>
+            <p:ph type="sldImg"/>
+          </p:nvPr>
+        </p:nvSpPr>
+        <p:spPr/>
+      </p:sp>
+      <p:sp>
+        <p:nvSpPr>
+          <p:cNvPr id="3" name="Notes Placeholder 2"/>
+          <p:cNvSpPr>
+            <a:spLocks noGrp="1"/>
+          </p:cNvSpPr>
+          <p:nvPr>
+            <p:ph type="body" idx="1"/>
+          </p:nvPr>
+        </p:nvSpPr>
+        <p:spPr/>
+        <p:txBody>
+          <a:bodyPr/>
+          <a:lstStyle/>
+          <a:p>
+            <a:r>
+              <a:rPr lang="en-US" dirty="0"/>
+              <a:t>Shaun</a:t>
+            </a:r>
+          </a:p>
+        </p:txBody>
+      </p:sp>
+      <p:sp>
+        <p:nvSpPr>
+          <p:cNvPr id="4" name="Slide Number Placeholder 3"/>
+          <p:cNvSpPr>
+            <a:spLocks noGrp="1"/>
+          </p:cNvSpPr>
+          <p:nvPr>
+            <p:ph type="sldNum" sz="quarter" idx="5"/>
+          </p:nvPr>
+        </p:nvSpPr>
+        <p:spPr/>
+        <p:txBody>
+          <a:bodyPr/>
+          <a:lstStyle/>
+          <a:p>
+            <a:fld id="{2FCC0B45-05A4-487E-9942-37DBE4C1976F}" type="slidenum">
+              <a:rPr lang="en-US" smtClean="0"/>
               <a:t>2</a:t>
             </a:fld>
             <a:endParaRPr lang="en-US"/>
@@ -541,6 +631,562 @@
     <p:extLst>
       <p:ext uri="{BB962C8B-B14F-4D97-AF65-F5344CB8AC3E}">
         <p14:creationId xmlns:p14="http://schemas.microsoft.com/office/powerpoint/2010/main" val="772570339"/>
+      </p:ext>
+    </p:extLst>
+  </p:cSld>
+  <p:clrMapOvr>
+    <a:masterClrMapping/>
+  </p:clrMapOvr>
+</p:notes>
+</file>
+
+<file path=ppt/notesSlides/notesSlide3.xml><?xml version="1.0" encoding="utf-8"?>
+<p:notes xmlns:a="http://schemas.openxmlformats.org/drawingml/2006/main" xmlns:r="http://schemas.openxmlformats.org/officeDocument/2006/relationships" xmlns:p="http://schemas.openxmlformats.org/presentationml/2006/main">
+  <p:cSld>
+    <p:spTree>
+      <p:nvGrpSpPr>
+        <p:cNvPr id="1" name=""/>
+        <p:cNvGrpSpPr/>
+        <p:nvPr/>
+      </p:nvGrpSpPr>
+      <p:grpSpPr>
+        <a:xfrm>
+          <a:off x="0" y="0"/>
+          <a:ext cx="0" cy="0"/>
+          <a:chOff x="0" y="0"/>
+          <a:chExt cx="0" cy="0"/>
+        </a:xfrm>
+      </p:grpSpPr>
+      <p:sp>
+        <p:nvSpPr>
+          <p:cNvPr id="2" name="Slide Image Placeholder 1"/>
+          <p:cNvSpPr>
+            <a:spLocks noGrp="1" noRot="1" noChangeAspect="1"/>
+          </p:cNvSpPr>
+          <p:nvPr>
+            <p:ph type="sldImg"/>
+          </p:nvPr>
+        </p:nvSpPr>
+        <p:spPr/>
+      </p:sp>
+      <p:sp>
+        <p:nvSpPr>
+          <p:cNvPr id="3" name="Notes Placeholder 2"/>
+          <p:cNvSpPr>
+            <a:spLocks noGrp="1"/>
+          </p:cNvSpPr>
+          <p:nvPr>
+            <p:ph type="body" idx="1"/>
+          </p:nvPr>
+        </p:nvSpPr>
+        <p:spPr/>
+        <p:txBody>
+          <a:bodyPr/>
+          <a:lstStyle/>
+          <a:p>
+            <a:r>
+              <a:rPr lang="en-US" dirty="0"/>
+              <a:t>Julian</a:t>
+            </a:r>
+          </a:p>
+        </p:txBody>
+      </p:sp>
+      <p:sp>
+        <p:nvSpPr>
+          <p:cNvPr id="4" name="Slide Number Placeholder 3"/>
+          <p:cNvSpPr>
+            <a:spLocks noGrp="1"/>
+          </p:cNvSpPr>
+          <p:nvPr>
+            <p:ph type="sldNum" sz="quarter" idx="5"/>
+          </p:nvPr>
+        </p:nvSpPr>
+        <p:spPr/>
+        <p:txBody>
+          <a:bodyPr/>
+          <a:lstStyle/>
+          <a:p>
+            <a:fld id="{2FCC0B45-05A4-487E-9942-37DBE4C1976F}" type="slidenum">
+              <a:rPr lang="en-US" smtClean="0"/>
+              <a:t>3</a:t>
+            </a:fld>
+            <a:endParaRPr lang="en-US"/>
+          </a:p>
+        </p:txBody>
+      </p:sp>
+    </p:spTree>
+    <p:extLst>
+      <p:ext uri="{BB962C8B-B14F-4D97-AF65-F5344CB8AC3E}">
+        <p14:creationId xmlns:p14="http://schemas.microsoft.com/office/powerpoint/2010/main" val="3481556506"/>
+      </p:ext>
+    </p:extLst>
+  </p:cSld>
+  <p:clrMapOvr>
+    <a:masterClrMapping/>
+  </p:clrMapOvr>
+</p:notes>
+</file>
+
+<file path=ppt/notesSlides/notesSlide4.xml><?xml version="1.0" encoding="utf-8"?>
+<p:notes xmlns:a="http://schemas.openxmlformats.org/drawingml/2006/main" xmlns:r="http://schemas.openxmlformats.org/officeDocument/2006/relationships" xmlns:p="http://schemas.openxmlformats.org/presentationml/2006/main">
+  <p:cSld>
+    <p:spTree>
+      <p:nvGrpSpPr>
+        <p:cNvPr id="1" name=""/>
+        <p:cNvGrpSpPr/>
+        <p:nvPr/>
+      </p:nvGrpSpPr>
+      <p:grpSpPr>
+        <a:xfrm>
+          <a:off x="0" y="0"/>
+          <a:ext cx="0" cy="0"/>
+          <a:chOff x="0" y="0"/>
+          <a:chExt cx="0" cy="0"/>
+        </a:xfrm>
+      </p:grpSpPr>
+      <p:sp>
+        <p:nvSpPr>
+          <p:cNvPr id="2" name="Slide Image Placeholder 1"/>
+          <p:cNvSpPr>
+            <a:spLocks noGrp="1" noRot="1" noChangeAspect="1"/>
+          </p:cNvSpPr>
+          <p:nvPr>
+            <p:ph type="sldImg"/>
+          </p:nvPr>
+        </p:nvSpPr>
+        <p:spPr/>
+      </p:sp>
+      <p:sp>
+        <p:nvSpPr>
+          <p:cNvPr id="3" name="Notes Placeholder 2"/>
+          <p:cNvSpPr>
+            <a:spLocks noGrp="1"/>
+          </p:cNvSpPr>
+          <p:nvPr>
+            <p:ph type="body" idx="1"/>
+          </p:nvPr>
+        </p:nvSpPr>
+        <p:spPr/>
+        <p:txBody>
+          <a:bodyPr/>
+          <a:lstStyle/>
+          <a:p>
+            <a:r>
+              <a:rPr lang="en-US" dirty="0"/>
+              <a:t>1</a:t>
+            </a:r>
+            <a:r>
+              <a:rPr lang="en-US" baseline="30000" dirty="0"/>
+              <a:t>st</a:t>
+            </a:r>
+            <a:r>
+              <a:rPr lang="en-US" dirty="0"/>
+              <a:t> part Shaun</a:t>
+            </a:r>
+          </a:p>
+          <a:p>
+            <a:r>
+              <a:rPr lang="en-US" dirty="0"/>
+              <a:t>2</a:t>
+            </a:r>
+            <a:r>
+              <a:rPr lang="en-US" baseline="30000" dirty="0"/>
+              <a:t>nd</a:t>
+            </a:r>
+            <a:r>
+              <a:rPr lang="en-US" dirty="0"/>
+              <a:t> part Julian</a:t>
+            </a:r>
+          </a:p>
+        </p:txBody>
+      </p:sp>
+      <p:sp>
+        <p:nvSpPr>
+          <p:cNvPr id="4" name="Slide Number Placeholder 3"/>
+          <p:cNvSpPr>
+            <a:spLocks noGrp="1"/>
+          </p:cNvSpPr>
+          <p:nvPr>
+            <p:ph type="sldNum" sz="quarter" idx="5"/>
+          </p:nvPr>
+        </p:nvSpPr>
+        <p:spPr/>
+        <p:txBody>
+          <a:bodyPr/>
+          <a:lstStyle/>
+          <a:p>
+            <a:fld id="{2FCC0B45-05A4-487E-9942-37DBE4C1976F}" type="slidenum">
+              <a:rPr lang="en-US" smtClean="0"/>
+              <a:t>4</a:t>
+            </a:fld>
+            <a:endParaRPr lang="en-US"/>
+          </a:p>
+        </p:txBody>
+      </p:sp>
+    </p:spTree>
+    <p:extLst>
+      <p:ext uri="{BB962C8B-B14F-4D97-AF65-F5344CB8AC3E}">
+        <p14:creationId xmlns:p14="http://schemas.microsoft.com/office/powerpoint/2010/main" val="1337478034"/>
+      </p:ext>
+    </p:extLst>
+  </p:cSld>
+  <p:clrMapOvr>
+    <a:masterClrMapping/>
+  </p:clrMapOvr>
+</p:notes>
+</file>
+
+<file path=ppt/notesSlides/notesSlide5.xml><?xml version="1.0" encoding="utf-8"?>
+<p:notes xmlns:a="http://schemas.openxmlformats.org/drawingml/2006/main" xmlns:r="http://schemas.openxmlformats.org/officeDocument/2006/relationships" xmlns:p="http://schemas.openxmlformats.org/presentationml/2006/main">
+  <p:cSld>
+    <p:spTree>
+      <p:nvGrpSpPr>
+        <p:cNvPr id="1" name=""/>
+        <p:cNvGrpSpPr/>
+        <p:nvPr/>
+      </p:nvGrpSpPr>
+      <p:grpSpPr>
+        <a:xfrm>
+          <a:off x="0" y="0"/>
+          <a:ext cx="0" cy="0"/>
+          <a:chOff x="0" y="0"/>
+          <a:chExt cx="0" cy="0"/>
+        </a:xfrm>
+      </p:grpSpPr>
+      <p:sp>
+        <p:nvSpPr>
+          <p:cNvPr id="2" name="Slide Image Placeholder 1"/>
+          <p:cNvSpPr>
+            <a:spLocks noGrp="1" noRot="1" noChangeAspect="1"/>
+          </p:cNvSpPr>
+          <p:nvPr>
+            <p:ph type="sldImg"/>
+          </p:nvPr>
+        </p:nvSpPr>
+        <p:spPr/>
+      </p:sp>
+      <p:sp>
+        <p:nvSpPr>
+          <p:cNvPr id="3" name="Notes Placeholder 2"/>
+          <p:cNvSpPr>
+            <a:spLocks noGrp="1"/>
+          </p:cNvSpPr>
+          <p:nvPr>
+            <p:ph type="body" idx="1"/>
+          </p:nvPr>
+        </p:nvSpPr>
+        <p:spPr/>
+        <p:txBody>
+          <a:bodyPr/>
+          <a:lstStyle/>
+          <a:p>
+            <a:r>
+              <a:rPr lang="en-US" dirty="0"/>
+              <a:t>1 &amp; 2 Shaun</a:t>
+            </a:r>
+          </a:p>
+          <a:p>
+            <a:r>
+              <a:rPr lang="en-US" dirty="0"/>
+              <a:t>3 Julian</a:t>
+            </a:r>
+          </a:p>
+        </p:txBody>
+      </p:sp>
+      <p:sp>
+        <p:nvSpPr>
+          <p:cNvPr id="4" name="Slide Number Placeholder 3"/>
+          <p:cNvSpPr>
+            <a:spLocks noGrp="1"/>
+          </p:cNvSpPr>
+          <p:nvPr>
+            <p:ph type="sldNum" sz="quarter" idx="5"/>
+          </p:nvPr>
+        </p:nvSpPr>
+        <p:spPr/>
+        <p:txBody>
+          <a:bodyPr/>
+          <a:lstStyle/>
+          <a:p>
+            <a:fld id="{2FCC0B45-05A4-487E-9942-37DBE4C1976F}" type="slidenum">
+              <a:rPr lang="en-US" smtClean="0"/>
+              <a:t>5</a:t>
+            </a:fld>
+            <a:endParaRPr lang="en-US"/>
+          </a:p>
+        </p:txBody>
+      </p:sp>
+    </p:spTree>
+    <p:extLst>
+      <p:ext uri="{BB962C8B-B14F-4D97-AF65-F5344CB8AC3E}">
+        <p14:creationId xmlns:p14="http://schemas.microsoft.com/office/powerpoint/2010/main" val="1710861884"/>
+      </p:ext>
+    </p:extLst>
+  </p:cSld>
+  <p:clrMapOvr>
+    <a:masterClrMapping/>
+  </p:clrMapOvr>
+</p:notes>
+</file>
+
+<file path=ppt/notesSlides/notesSlide6.xml><?xml version="1.0" encoding="utf-8"?>
+<p:notes xmlns:a="http://schemas.openxmlformats.org/drawingml/2006/main" xmlns:r="http://schemas.openxmlformats.org/officeDocument/2006/relationships" xmlns:p="http://schemas.openxmlformats.org/presentationml/2006/main">
+  <p:cSld>
+    <p:spTree>
+      <p:nvGrpSpPr>
+        <p:cNvPr id="1" name=""/>
+        <p:cNvGrpSpPr/>
+        <p:nvPr/>
+      </p:nvGrpSpPr>
+      <p:grpSpPr>
+        <a:xfrm>
+          <a:off x="0" y="0"/>
+          <a:ext cx="0" cy="0"/>
+          <a:chOff x="0" y="0"/>
+          <a:chExt cx="0" cy="0"/>
+        </a:xfrm>
+      </p:grpSpPr>
+      <p:sp>
+        <p:nvSpPr>
+          <p:cNvPr id="2" name="Slide Image Placeholder 1"/>
+          <p:cNvSpPr>
+            <a:spLocks noGrp="1" noRot="1" noChangeAspect="1"/>
+          </p:cNvSpPr>
+          <p:nvPr>
+            <p:ph type="sldImg"/>
+          </p:nvPr>
+        </p:nvSpPr>
+        <p:spPr/>
+      </p:sp>
+      <p:sp>
+        <p:nvSpPr>
+          <p:cNvPr id="3" name="Notes Placeholder 2"/>
+          <p:cNvSpPr>
+            <a:spLocks noGrp="1"/>
+          </p:cNvSpPr>
+          <p:nvPr>
+            <p:ph type="body" idx="1"/>
+          </p:nvPr>
+        </p:nvSpPr>
+        <p:spPr/>
+        <p:txBody>
+          <a:bodyPr/>
+          <a:lstStyle/>
+          <a:p>
+            <a:r>
+              <a:rPr lang="en-US" dirty="0"/>
+              <a:t>Shaun</a:t>
+            </a:r>
+          </a:p>
+        </p:txBody>
+      </p:sp>
+      <p:sp>
+        <p:nvSpPr>
+          <p:cNvPr id="4" name="Slide Number Placeholder 3"/>
+          <p:cNvSpPr>
+            <a:spLocks noGrp="1"/>
+          </p:cNvSpPr>
+          <p:nvPr>
+            <p:ph type="sldNum" sz="quarter" idx="5"/>
+          </p:nvPr>
+        </p:nvSpPr>
+        <p:spPr/>
+        <p:txBody>
+          <a:bodyPr/>
+          <a:lstStyle/>
+          <a:p>
+            <a:fld id="{2FCC0B45-05A4-487E-9942-37DBE4C1976F}" type="slidenum">
+              <a:rPr lang="en-US" smtClean="0"/>
+              <a:t>6</a:t>
+            </a:fld>
+            <a:endParaRPr lang="en-US"/>
+          </a:p>
+        </p:txBody>
+      </p:sp>
+    </p:spTree>
+    <p:extLst>
+      <p:ext uri="{BB962C8B-B14F-4D97-AF65-F5344CB8AC3E}">
+        <p14:creationId xmlns:p14="http://schemas.microsoft.com/office/powerpoint/2010/main" val="2258399597"/>
+      </p:ext>
+    </p:extLst>
+  </p:cSld>
+  <p:clrMapOvr>
+    <a:masterClrMapping/>
+  </p:clrMapOvr>
+</p:notes>
+</file>
+
+<file path=ppt/notesSlides/notesSlide7.xml><?xml version="1.0" encoding="utf-8"?>
+<p:notes xmlns:a="http://schemas.openxmlformats.org/drawingml/2006/main" xmlns:r="http://schemas.openxmlformats.org/officeDocument/2006/relationships" xmlns:p="http://schemas.openxmlformats.org/presentationml/2006/main">
+  <p:cSld>
+    <p:spTree>
+      <p:nvGrpSpPr>
+        <p:cNvPr id="1" name=""/>
+        <p:cNvGrpSpPr/>
+        <p:nvPr/>
+      </p:nvGrpSpPr>
+      <p:grpSpPr>
+        <a:xfrm>
+          <a:off x="0" y="0"/>
+          <a:ext cx="0" cy="0"/>
+          <a:chOff x="0" y="0"/>
+          <a:chExt cx="0" cy="0"/>
+        </a:xfrm>
+      </p:grpSpPr>
+      <p:sp>
+        <p:nvSpPr>
+          <p:cNvPr id="2" name="Slide Image Placeholder 1"/>
+          <p:cNvSpPr>
+            <a:spLocks noGrp="1" noRot="1" noChangeAspect="1"/>
+          </p:cNvSpPr>
+          <p:nvPr>
+            <p:ph type="sldImg"/>
+          </p:nvPr>
+        </p:nvSpPr>
+        <p:spPr/>
+      </p:sp>
+      <p:sp>
+        <p:nvSpPr>
+          <p:cNvPr id="3" name="Notes Placeholder 2"/>
+          <p:cNvSpPr>
+            <a:spLocks noGrp="1"/>
+          </p:cNvSpPr>
+          <p:nvPr>
+            <p:ph type="body" idx="1"/>
+          </p:nvPr>
+        </p:nvSpPr>
+        <p:spPr/>
+        <p:txBody>
+          <a:bodyPr/>
+          <a:lstStyle/>
+          <a:p>
+            <a:r>
+              <a:rPr lang="en-US" dirty="0"/>
+              <a:t>Shaun for demonstration</a:t>
+            </a:r>
+          </a:p>
+          <a:p>
+            <a:r>
+              <a:rPr lang="en-US" dirty="0"/>
+              <a:t>Julian for total weight</a:t>
+            </a:r>
+          </a:p>
+        </p:txBody>
+      </p:sp>
+      <p:sp>
+        <p:nvSpPr>
+          <p:cNvPr id="4" name="Slide Number Placeholder 3"/>
+          <p:cNvSpPr>
+            <a:spLocks noGrp="1"/>
+          </p:cNvSpPr>
+          <p:nvPr>
+            <p:ph type="sldNum" sz="quarter" idx="5"/>
+          </p:nvPr>
+        </p:nvSpPr>
+        <p:spPr/>
+        <p:txBody>
+          <a:bodyPr/>
+          <a:lstStyle/>
+          <a:p>
+            <a:fld id="{2FCC0B45-05A4-487E-9942-37DBE4C1976F}" type="slidenum">
+              <a:rPr lang="en-US" smtClean="0"/>
+              <a:t>7</a:t>
+            </a:fld>
+            <a:endParaRPr lang="en-US"/>
+          </a:p>
+        </p:txBody>
+      </p:sp>
+    </p:spTree>
+    <p:extLst>
+      <p:ext uri="{BB962C8B-B14F-4D97-AF65-F5344CB8AC3E}">
+        <p14:creationId xmlns:p14="http://schemas.microsoft.com/office/powerpoint/2010/main" val="4188159652"/>
+      </p:ext>
+    </p:extLst>
+  </p:cSld>
+  <p:clrMapOvr>
+    <a:masterClrMapping/>
+  </p:clrMapOvr>
+</p:notes>
+</file>
+
+<file path=ppt/notesSlides/notesSlide8.xml><?xml version="1.0" encoding="utf-8"?>
+<p:notes xmlns:a="http://schemas.openxmlformats.org/drawingml/2006/main" xmlns:r="http://schemas.openxmlformats.org/officeDocument/2006/relationships" xmlns:p="http://schemas.openxmlformats.org/presentationml/2006/main">
+  <p:cSld>
+    <p:spTree>
+      <p:nvGrpSpPr>
+        <p:cNvPr id="1" name=""/>
+        <p:cNvGrpSpPr/>
+        <p:nvPr/>
+      </p:nvGrpSpPr>
+      <p:grpSpPr>
+        <a:xfrm>
+          <a:off x="0" y="0"/>
+          <a:ext cx="0" cy="0"/>
+          <a:chOff x="0" y="0"/>
+          <a:chExt cx="0" cy="0"/>
+        </a:xfrm>
+      </p:grpSpPr>
+      <p:sp>
+        <p:nvSpPr>
+          <p:cNvPr id="2" name="Slide Image Placeholder 1"/>
+          <p:cNvSpPr>
+            <a:spLocks noGrp="1" noRot="1" noChangeAspect="1"/>
+          </p:cNvSpPr>
+          <p:nvPr>
+            <p:ph type="sldImg"/>
+          </p:nvPr>
+        </p:nvSpPr>
+        <p:spPr/>
+      </p:sp>
+      <p:sp>
+        <p:nvSpPr>
+          <p:cNvPr id="3" name="Notes Placeholder 2"/>
+          <p:cNvSpPr>
+            <a:spLocks noGrp="1"/>
+          </p:cNvSpPr>
+          <p:nvPr>
+            <p:ph type="body" idx="1"/>
+          </p:nvPr>
+        </p:nvSpPr>
+        <p:spPr/>
+        <p:txBody>
+          <a:bodyPr/>
+          <a:lstStyle/>
+          <a:p>
+            <a:r>
+              <a:rPr lang="en-US" dirty="0"/>
+              <a:t>Shaun</a:t>
+            </a:r>
+          </a:p>
+        </p:txBody>
+      </p:sp>
+      <p:sp>
+        <p:nvSpPr>
+          <p:cNvPr id="4" name="Slide Number Placeholder 3"/>
+          <p:cNvSpPr>
+            <a:spLocks noGrp="1"/>
+          </p:cNvSpPr>
+          <p:nvPr>
+            <p:ph type="sldNum" sz="quarter" idx="5"/>
+          </p:nvPr>
+        </p:nvSpPr>
+        <p:spPr/>
+        <p:txBody>
+          <a:bodyPr/>
+          <a:lstStyle/>
+          <a:p>
+            <a:fld id="{2FCC0B45-05A4-487E-9942-37DBE4C1976F}" type="slidenum">
+              <a:rPr lang="en-US" smtClean="0"/>
+              <a:t>8</a:t>
+            </a:fld>
+            <a:endParaRPr lang="en-US"/>
+          </a:p>
+        </p:txBody>
+      </p:sp>
+    </p:spTree>
+    <p:extLst>
+      <p:ext uri="{BB962C8B-B14F-4D97-AF65-F5344CB8AC3E}">
+        <p14:creationId xmlns:p14="http://schemas.microsoft.com/office/powerpoint/2010/main" val="2654370137"/>
       </p:ext>
     </p:extLst>
   </p:cSld>
@@ -3779,12 +4425,12 @@
           <p:nvPr/>
         </p:nvPicPr>
         <p:blipFill>
-          <a:blip r:embed="rId2">
+          <a:blip r:embed="rId3">
             <a:alphaModFix amt="20000"/>
             <a:extLst>
               <a:ext uri="{BEBA8EAE-BF5A-486C-A8C5-ECC9F3942E4B}">
                 <a14:imgProps xmlns:a14="http://schemas.microsoft.com/office/drawing/2010/main">
-                  <a14:imgLayer r:embed="rId3">
+                  <a14:imgLayer r:embed="rId4">
                     <a14:imgEffect>
                       <a14:sharpenSoften amount="38000"/>
                     </a14:imgEffect>
@@ -4376,7 +5022,7 @@
           <a:p>
             <a:r>
               <a:rPr lang="en-US" sz="1100" dirty="0">
-                <a:hlinkClick r:id="rId2"/>
+                <a:hlinkClick r:id="rId3"/>
               </a:rPr>
               <a:t>https://www.glassdoor.com/Interview/Implement-kruskal-s-algorithm-in-about-30-minutes-QTN_1966985.htm</a:t>
             </a:r>
@@ -4653,7 +5299,7 @@
           <a:p>
             <a:r>
               <a:rPr lang="en-US" sz="1100" dirty="0">
-                <a:hlinkClick r:id="rId2"/>
+                <a:hlinkClick r:id="rId3"/>
               </a:rPr>
               <a:t>https://en.wikipedia.org/wiki/Minimum_spanning_tree#Algorithms</a:t>
             </a:r>
@@ -4662,7 +5308,7 @@
           <a:p>
             <a:r>
               <a:rPr lang="en-US" sz="1100" dirty="0">
-                <a:hlinkClick r:id="rId3"/>
+                <a:hlinkClick r:id="rId4"/>
               </a:rPr>
               <a:t>https://en.wikipedia.org/wiki/Kruskal's_algorithm</a:t>
             </a:r>
@@ -4685,7 +5331,7 @@
           <p:nvPr/>
         </p:nvPicPr>
         <p:blipFill>
-          <a:blip r:embed="rId4">
+          <a:blip r:embed="rId5">
             <a:extLst>
               <a:ext uri="{28A0092B-C50C-407E-A947-70E740481C1C}">
                 <a14:useLocalDpi xmlns:a14="http://schemas.microsoft.com/office/drawing/2010/main" val="0"/>
@@ -4844,6 +5490,334 @@
           <p:cNvPr id="2" name="Title 1">
             <a:extLst>
               <a:ext uri="{FF2B5EF4-FFF2-40B4-BE49-F238E27FC236}">
+                <a16:creationId xmlns:a16="http://schemas.microsoft.com/office/drawing/2014/main" id="{3AD4DFC0-9CD0-5F3D-13F1-B7BDDCA0BC35}"/>
+              </a:ext>
+            </a:extLst>
+          </p:cNvPr>
+          <p:cNvSpPr>
+            <a:spLocks noGrp="1"/>
+          </p:cNvSpPr>
+          <p:nvPr>
+            <p:ph type="title"/>
+          </p:nvPr>
+        </p:nvSpPr>
+        <p:spPr/>
+        <p:txBody>
+          <a:bodyPr/>
+          <a:lstStyle/>
+          <a:p>
+            <a:r>
+              <a:rPr lang="en-US" b="1" dirty="0">
+                <a:latin typeface="Courier New" panose="02070309020205020404" pitchFamily="49" charset="0"/>
+                <a:cs typeface="Courier New" panose="02070309020205020404" pitchFamily="49" charset="0"/>
+              </a:rPr>
+              <a:t>Union-Find ADT</a:t>
+            </a:r>
+          </a:p>
+        </p:txBody>
+      </p:sp>
+      <p:cxnSp>
+        <p:nvCxnSpPr>
+          <p:cNvPr id="4" name="Straight Connector 3">
+            <a:extLst>
+              <a:ext uri="{FF2B5EF4-FFF2-40B4-BE49-F238E27FC236}">
+                <a16:creationId xmlns:a16="http://schemas.microsoft.com/office/drawing/2014/main" id="{B91EC3CC-DC6F-FF5E-3943-C97857A9F9E1}"/>
+              </a:ext>
+            </a:extLst>
+          </p:cNvPr>
+          <p:cNvCxnSpPr/>
+          <p:nvPr/>
+        </p:nvCxnSpPr>
+        <p:spPr>
+          <a:xfrm>
+            <a:off x="838200" y="1320798"/>
+            <a:ext cx="10515600" cy="0"/>
+          </a:xfrm>
+          <a:prstGeom prst="line">
+            <a:avLst/>
+          </a:prstGeom>
+          <a:ln w="44450"/>
+        </p:spPr>
+        <p:style>
+          <a:lnRef idx="2">
+            <a:schemeClr val="dk1"/>
+          </a:lnRef>
+          <a:fillRef idx="0">
+            <a:schemeClr val="dk1"/>
+          </a:fillRef>
+          <a:effectRef idx="1">
+            <a:schemeClr val="dk1"/>
+          </a:effectRef>
+          <a:fontRef idx="minor">
+            <a:schemeClr val="tx1"/>
+          </a:fontRef>
+        </p:style>
+      </p:cxnSp>
+      <p:sp>
+        <p:nvSpPr>
+          <p:cNvPr id="6" name="TextBox 5">
+            <a:extLst>
+              <a:ext uri="{FF2B5EF4-FFF2-40B4-BE49-F238E27FC236}">
+                <a16:creationId xmlns:a16="http://schemas.microsoft.com/office/drawing/2014/main" id="{729FAFA2-ADE5-A151-C89C-C75222FA307E}"/>
+              </a:ext>
+            </a:extLst>
+          </p:cNvPr>
+          <p:cNvSpPr txBox="1"/>
+          <p:nvPr/>
+        </p:nvSpPr>
+        <p:spPr>
+          <a:xfrm>
+            <a:off x="838200" y="1649099"/>
+            <a:ext cx="4972050" cy="2308324"/>
+          </a:xfrm>
+          <a:prstGeom prst="rect">
+            <a:avLst/>
+          </a:prstGeom>
+          <a:noFill/>
+        </p:spPr>
+        <p:txBody>
+          <a:bodyPr wrap="square" rtlCol="0">
+            <a:spAutoFit/>
+          </a:bodyPr>
+          <a:lstStyle/>
+          <a:p>
+            <a:r>
+              <a:rPr lang="en-US" b="1" dirty="0">
+                <a:latin typeface="Courier New" panose="02070309020205020404" pitchFamily="49" charset="0"/>
+                <a:cs typeface="Courier New" panose="02070309020205020404" pitchFamily="49" charset="0"/>
+              </a:rPr>
+              <a:t>- Also known as a disjoint-set data structure, the union-find structure is a data structure that stores a collection of disjoint sets.</a:t>
+            </a:r>
+          </a:p>
+          <a:p>
+            <a:r>
+              <a:rPr lang="en-US" b="1" dirty="0">
+                <a:latin typeface="Courier New" panose="02070309020205020404" pitchFamily="49" charset="0"/>
+                <a:cs typeface="Courier New" panose="02070309020205020404" pitchFamily="49" charset="0"/>
+              </a:rPr>
+              <a:t>- The primary functions of it are adding new sets, merging sets, and finding the representing member of a set. </a:t>
+            </a:r>
+          </a:p>
+        </p:txBody>
+      </p:sp>
+      <p:sp>
+        <p:nvSpPr>
+          <p:cNvPr id="8" name="TextBox 7">
+            <a:extLst>
+              <a:ext uri="{FF2B5EF4-FFF2-40B4-BE49-F238E27FC236}">
+                <a16:creationId xmlns:a16="http://schemas.microsoft.com/office/drawing/2014/main" id="{1FDA851B-B0BD-DAB6-976D-345BE5FDA741}"/>
+              </a:ext>
+            </a:extLst>
+          </p:cNvPr>
+          <p:cNvSpPr txBox="1"/>
+          <p:nvPr/>
+        </p:nvSpPr>
+        <p:spPr>
+          <a:xfrm>
+            <a:off x="6096000" y="2413413"/>
+            <a:ext cx="4972050" cy="2862322"/>
+          </a:xfrm>
+          <a:prstGeom prst="rect">
+            <a:avLst/>
+          </a:prstGeom>
+          <a:noFill/>
+        </p:spPr>
+        <p:txBody>
+          <a:bodyPr wrap="square" rtlCol="0">
+            <a:spAutoFit/>
+          </a:bodyPr>
+          <a:lstStyle/>
+          <a:p>
+            <a:r>
+              <a:rPr lang="en-US" b="1" dirty="0">
+                <a:latin typeface="Courier New" panose="02070309020205020404" pitchFamily="49" charset="0"/>
+                <a:cs typeface="Courier New" panose="02070309020205020404" pitchFamily="49" charset="0"/>
+              </a:rPr>
+              <a:t>- This data structure is critical for Kruskal’s Algorithm as it allows for very efficient checking of loops. </a:t>
+            </a:r>
+          </a:p>
+          <a:p>
+            <a:r>
+              <a:rPr lang="en-US" b="1" dirty="0">
+                <a:latin typeface="Courier New" panose="02070309020205020404" pitchFamily="49" charset="0"/>
+                <a:cs typeface="Courier New" panose="02070309020205020404" pitchFamily="49" charset="0"/>
+              </a:rPr>
+              <a:t>- Since union can only be called on two disconnected sets it ensures that no loops will be formed. When a valid union is found it means the edge connecting those two trees is valid.</a:t>
+            </a:r>
+          </a:p>
+        </p:txBody>
+      </p:sp>
+      <p:sp>
+        <p:nvSpPr>
+          <p:cNvPr id="9" name="TextBox 8">
+            <a:extLst>
+              <a:ext uri="{FF2B5EF4-FFF2-40B4-BE49-F238E27FC236}">
+                <a16:creationId xmlns:a16="http://schemas.microsoft.com/office/drawing/2014/main" id="{90D11E4A-806D-12DE-477E-C0BBF40BA4D0}"/>
+              </a:ext>
+            </a:extLst>
+          </p:cNvPr>
+          <p:cNvSpPr txBox="1"/>
+          <p:nvPr/>
+        </p:nvSpPr>
+        <p:spPr>
+          <a:xfrm>
+            <a:off x="0" y="6594047"/>
+            <a:ext cx="6753225" cy="261610"/>
+          </a:xfrm>
+          <a:prstGeom prst="rect">
+            <a:avLst/>
+          </a:prstGeom>
+          <a:noFill/>
+        </p:spPr>
+        <p:txBody>
+          <a:bodyPr wrap="square" rtlCol="0">
+            <a:spAutoFit/>
+          </a:bodyPr>
+          <a:lstStyle/>
+          <a:p>
+            <a:r>
+              <a:rPr lang="en-US" sz="1100" dirty="0">
+                <a:hlinkClick r:id="rId3"/>
+              </a:rPr>
+              <a:t>https://en.wikipedia.org/wiki/Disjoint-set_data_structure</a:t>
+            </a:r>
+            <a:endParaRPr lang="en-US" sz="1100" dirty="0"/>
+          </a:p>
+        </p:txBody>
+      </p:sp>
+      <p:sp>
+        <p:nvSpPr>
+          <p:cNvPr id="11" name="TextBox 10">
+            <a:extLst>
+              <a:ext uri="{FF2B5EF4-FFF2-40B4-BE49-F238E27FC236}">
+                <a16:creationId xmlns:a16="http://schemas.microsoft.com/office/drawing/2014/main" id="{FD60A16F-A8BA-D852-1240-22F91FD2CD1C}"/>
+              </a:ext>
+            </a:extLst>
+          </p:cNvPr>
+          <p:cNvSpPr txBox="1"/>
+          <p:nvPr/>
+        </p:nvSpPr>
+        <p:spPr>
+          <a:xfrm>
+            <a:off x="838200" y="4426782"/>
+            <a:ext cx="4972050" cy="1923604"/>
+          </a:xfrm>
+          <a:prstGeom prst="rect">
+            <a:avLst/>
+          </a:prstGeom>
+          <a:noFill/>
+        </p:spPr>
+        <p:txBody>
+          <a:bodyPr wrap="square">
+            <a:spAutoFit/>
+          </a:bodyPr>
+          <a:lstStyle/>
+          <a:p>
+            <a:r>
+              <a:rPr lang="en-US" sz="1800" b="1" dirty="0">
+                <a:latin typeface="Courier New" panose="02070309020205020404" pitchFamily="49" charset="0"/>
+                <a:cs typeface="Courier New" panose="02070309020205020404" pitchFamily="49" charset="0"/>
+              </a:rPr>
+              <a:t>- The find function allows for efficient checks of two elements sharing a set.</a:t>
+            </a:r>
+          </a:p>
+          <a:p>
+            <a:r>
+              <a:rPr lang="en-US" sz="1800" b="1" dirty="0">
+                <a:latin typeface="Courier New" panose="02070309020205020404" pitchFamily="49" charset="0"/>
+                <a:cs typeface="Courier New" panose="02070309020205020404" pitchFamily="49" charset="0"/>
+              </a:rPr>
+              <a:t>- The find operation runs in near constant time, O(</a:t>
+            </a:r>
+            <a:r>
+              <a:rPr lang="el-GR" sz="1800" b="1" dirty="0">
+                <a:latin typeface="Courier New" panose="02070309020205020404" pitchFamily="49" charset="0"/>
+                <a:cs typeface="Courier New" panose="02070309020205020404" pitchFamily="49" charset="0"/>
+              </a:rPr>
+              <a:t>α(</a:t>
+            </a:r>
+            <a:r>
+              <a:rPr lang="en-US" sz="1800" b="1" dirty="0">
+                <a:latin typeface="Courier New" panose="02070309020205020404" pitchFamily="49" charset="0"/>
+                <a:cs typeface="Courier New" panose="02070309020205020404" pitchFamily="49" charset="0"/>
+              </a:rPr>
+              <a:t>n)).</a:t>
+            </a:r>
+            <a:br>
+              <a:rPr lang="en-US" sz="1800" b="1" dirty="0">
+                <a:latin typeface="Courier New" panose="02070309020205020404" pitchFamily="49" charset="0"/>
+                <a:cs typeface="Courier New" panose="02070309020205020404" pitchFamily="49" charset="0"/>
+              </a:rPr>
+            </a:br>
+            <a:br>
+              <a:rPr lang="en-US" sz="1800" b="1" dirty="0">
+                <a:latin typeface="Courier New" panose="02070309020205020404" pitchFamily="49" charset="0"/>
+                <a:cs typeface="Courier New" panose="02070309020205020404" pitchFamily="49" charset="0"/>
+              </a:rPr>
+            </a:br>
+            <a:r>
+              <a:rPr lang="en-US" sz="1100" b="1" dirty="0">
+                <a:latin typeface="Courier New" panose="02070309020205020404" pitchFamily="49" charset="0"/>
+                <a:cs typeface="Courier New" panose="02070309020205020404" pitchFamily="49" charset="0"/>
+              </a:rPr>
+              <a:t>(</a:t>
+            </a:r>
+            <a:r>
+              <a:rPr lang="el-GR" sz="1100" b="1" dirty="0">
+                <a:latin typeface="Courier New" panose="02070309020205020404" pitchFamily="49" charset="0"/>
+                <a:cs typeface="Courier New" panose="02070309020205020404" pitchFamily="49" charset="0"/>
+              </a:rPr>
+              <a:t>α</a:t>
+            </a:r>
+            <a:r>
+              <a:rPr lang="en-US" sz="1100" b="1" dirty="0">
+                <a:latin typeface="Courier New" panose="02070309020205020404" pitchFamily="49" charset="0"/>
+                <a:cs typeface="Courier New" panose="02070309020205020404" pitchFamily="49" charset="0"/>
+              </a:rPr>
+              <a:t> being the inverse Ackermann function)</a:t>
+            </a:r>
+            <a:endParaRPr lang="en-US" sz="1800" b="1" dirty="0">
+              <a:latin typeface="Courier New" panose="02070309020205020404" pitchFamily="49" charset="0"/>
+              <a:cs typeface="Courier New" panose="02070309020205020404" pitchFamily="49" charset="0"/>
+            </a:endParaRPr>
+          </a:p>
+        </p:txBody>
+      </p:sp>
+    </p:spTree>
+    <p:extLst>
+      <p:ext uri="{BB962C8B-B14F-4D97-AF65-F5344CB8AC3E}">
+        <p14:creationId xmlns:p14="http://schemas.microsoft.com/office/powerpoint/2010/main" val="3542287999"/>
+      </p:ext>
+    </p:extLst>
+  </p:cSld>
+  <p:clrMapOvr>
+    <a:masterClrMapping/>
+  </p:clrMapOvr>
+</p:sld>
+</file>
+
+<file path=ppt/slides/slide6.xml><?xml version="1.0" encoding="utf-8"?>
+<p:sld xmlns:a="http://schemas.openxmlformats.org/drawingml/2006/main" xmlns:r="http://schemas.openxmlformats.org/officeDocument/2006/relationships" xmlns:p="http://schemas.openxmlformats.org/presentationml/2006/main">
+  <p:cSld>
+    <p:spTree>
+      <p:nvGrpSpPr>
+        <p:cNvPr id="1" name=""/>
+        <p:cNvGrpSpPr/>
+        <p:nvPr/>
+      </p:nvGrpSpPr>
+      <p:grpSpPr>
+        <a:xfrm>
+          <a:off x="0" y="0"/>
+          <a:ext cx="0" cy="0"/>
+          <a:chOff x="0" y="0"/>
+          <a:chExt cx="0" cy="0"/>
+        </a:xfrm>
+      </p:grpSpPr>
+      <p:sp>
+        <p:nvSpPr>
+          <p:cNvPr id="2" name="Title 1">
+            <a:extLst>
+              <a:ext uri="{FF2B5EF4-FFF2-40B4-BE49-F238E27FC236}">
                 <a16:creationId xmlns:a16="http://schemas.microsoft.com/office/drawing/2014/main" id="{C7F58279-4F34-98D8-A96E-C4E85C5FEE76}"/>
               </a:ext>
             </a:extLst>
@@ -5132,7 +6106,7 @@
 </p:sld>
 </file>
 
-<file path=ppt/slides/slide6.xml><?xml version="1.0" encoding="utf-8"?>
+<file path=ppt/slides/slide7.xml><?xml version="1.0" encoding="utf-8"?>
 <p:sld xmlns:a="http://schemas.openxmlformats.org/drawingml/2006/main" xmlns:r="http://schemas.openxmlformats.org/officeDocument/2006/relationships" xmlns:p="http://schemas.openxmlformats.org/presentationml/2006/main">
   <p:cSld>
     <p:spTree>
@@ -5234,7 +6208,7 @@
           <p:nvPr/>
         </p:nvPicPr>
         <p:blipFill>
-          <a:blip r:embed="rId2">
+          <a:blip r:embed="rId3">
             <a:extLst>
               <a:ext uri="{28A0092B-C50C-407E-A947-70E740481C1C}">
                 <a14:useLocalDpi xmlns:a14="http://schemas.microsoft.com/office/drawing/2010/main" val="0"/>
@@ -8334,7 +9308,7 @@
 </p:sld>
 </file>
 
-<file path=ppt/slides/slide7.xml><?xml version="1.0" encoding="utf-8"?>
+<file path=ppt/slides/slide8.xml><?xml version="1.0" encoding="utf-8"?>
 <p:sld xmlns:a="http://schemas.openxmlformats.org/drawingml/2006/main" xmlns:r="http://schemas.openxmlformats.org/officeDocument/2006/relationships" xmlns:p="http://schemas.openxmlformats.org/presentationml/2006/main">
   <p:cSld>
     <p:spTree>
@@ -8356,7 +9330,7 @@
           <p:cNvPr id="2" name="Title 1">
             <a:extLst>
               <a:ext uri="{FF2B5EF4-FFF2-40B4-BE49-F238E27FC236}">
-                <a16:creationId xmlns:a16="http://schemas.microsoft.com/office/drawing/2014/main" id="{3AD4DFC0-9CD0-5F3D-13F1-B7BDDCA0BC35}"/>
+                <a16:creationId xmlns:a16="http://schemas.microsoft.com/office/drawing/2014/main" id="{1AF53A6C-0830-FF2E-C7B4-1A4812A59603}"/>
               </a:ext>
             </a:extLst>
           </p:cNvPr>
@@ -8377,7 +9351,7 @@
                 <a:latin typeface="Courier New" panose="02070309020205020404" pitchFamily="49" charset="0"/>
                 <a:cs typeface="Courier New" panose="02070309020205020404" pitchFamily="49" charset="0"/>
               </a:rPr>
-              <a:t>Union-Find ADT</a:t>
+              <a:t>GitHub repository &amp; Sources</a:t>
             </a:r>
           </a:p>
         </p:txBody>
@@ -8387,7 +9361,7 @@
           <p:cNvPr id="4" name="Straight Connector 3">
             <a:extLst>
               <a:ext uri="{FF2B5EF4-FFF2-40B4-BE49-F238E27FC236}">
-                <a16:creationId xmlns:a16="http://schemas.microsoft.com/office/drawing/2014/main" id="{B91EC3CC-DC6F-FF5E-3943-C97857A9F9E1}"/>
+                <a16:creationId xmlns:a16="http://schemas.microsoft.com/office/drawing/2014/main" id="{94B7F427-C3E0-F420-5795-5B77230EB33F}"/>
               </a:ext>
             </a:extLst>
           </p:cNvPr>
@@ -8421,305 +9395,6 @@
       </p:cxnSp>
       <p:sp>
         <p:nvSpPr>
-          <p:cNvPr id="6" name="TextBox 5">
-            <a:extLst>
-              <a:ext uri="{FF2B5EF4-FFF2-40B4-BE49-F238E27FC236}">
-                <a16:creationId xmlns:a16="http://schemas.microsoft.com/office/drawing/2014/main" id="{729FAFA2-ADE5-A151-C89C-C75222FA307E}"/>
-              </a:ext>
-            </a:extLst>
-          </p:cNvPr>
-          <p:cNvSpPr txBox="1"/>
-          <p:nvPr/>
-        </p:nvSpPr>
-        <p:spPr>
-          <a:xfrm>
-            <a:off x="838200" y="1776413"/>
-            <a:ext cx="4972050" cy="3139321"/>
-          </a:xfrm>
-          <a:prstGeom prst="rect">
-            <a:avLst/>
-          </a:prstGeom>
-          <a:noFill/>
-        </p:spPr>
-        <p:txBody>
-          <a:bodyPr wrap="square" rtlCol="0">
-            <a:spAutoFit/>
-          </a:bodyPr>
-          <a:lstStyle/>
-          <a:p>
-            <a:r>
-              <a:rPr lang="en-US" b="1" dirty="0">
-                <a:latin typeface="Courier New" panose="02070309020205020404" pitchFamily="49" charset="0"/>
-                <a:cs typeface="Courier New" panose="02070309020205020404" pitchFamily="49" charset="0"/>
-              </a:rPr>
-              <a:t>- Also known as a disjoint-set data structure, the union-find structure is a data structure that stores a collection of disjoint sets.</a:t>
-            </a:r>
-          </a:p>
-          <a:p>
-            <a:r>
-              <a:rPr lang="en-US" b="1" dirty="0">
-                <a:latin typeface="Courier New" panose="02070309020205020404" pitchFamily="49" charset="0"/>
-                <a:cs typeface="Courier New" panose="02070309020205020404" pitchFamily="49" charset="0"/>
-              </a:rPr>
-              <a:t>- The primary functions of it are adding new sets, merging sets, and finding the representing member of a set. </a:t>
-            </a:r>
-          </a:p>
-          <a:p>
-            <a:r>
-              <a:rPr lang="en-US" b="1" dirty="0">
-                <a:latin typeface="Courier New" panose="02070309020205020404" pitchFamily="49" charset="0"/>
-                <a:cs typeface="Courier New" panose="02070309020205020404" pitchFamily="49" charset="0"/>
-              </a:rPr>
-              <a:t>- The find function allows for efficient checks of two elements sharing a set.</a:t>
-            </a:r>
-          </a:p>
-        </p:txBody>
-      </p:sp>
-      <p:sp>
-        <p:nvSpPr>
-          <p:cNvPr id="8" name="TextBox 7">
-            <a:extLst>
-              <a:ext uri="{FF2B5EF4-FFF2-40B4-BE49-F238E27FC236}">
-                <a16:creationId xmlns:a16="http://schemas.microsoft.com/office/drawing/2014/main" id="{1FDA851B-B0BD-DAB6-976D-345BE5FDA741}"/>
-              </a:ext>
-            </a:extLst>
-          </p:cNvPr>
-          <p:cNvSpPr txBox="1"/>
-          <p:nvPr/>
-        </p:nvSpPr>
-        <p:spPr>
-          <a:xfrm>
-            <a:off x="6096000" y="2276472"/>
-            <a:ext cx="4972050" cy="3862596"/>
-          </a:xfrm>
-          <a:prstGeom prst="rect">
-            <a:avLst/>
-          </a:prstGeom>
-          <a:noFill/>
-        </p:spPr>
-        <p:txBody>
-          <a:bodyPr wrap="square" rtlCol="0">
-            <a:spAutoFit/>
-          </a:bodyPr>
-          <a:lstStyle/>
-          <a:p>
-            <a:r>
-              <a:rPr lang="en-US" b="1" dirty="0">
-                <a:latin typeface="Courier New" panose="02070309020205020404" pitchFamily="49" charset="0"/>
-                <a:cs typeface="Courier New" panose="02070309020205020404" pitchFamily="49" charset="0"/>
-              </a:rPr>
-              <a:t>- This data structure is critical for Kruskal’s Algorithm as it allows for very efficient checking of loops. </a:t>
-            </a:r>
-          </a:p>
-          <a:p>
-            <a:r>
-              <a:rPr lang="en-US" b="1" dirty="0">
-                <a:latin typeface="Courier New" panose="02070309020205020404" pitchFamily="49" charset="0"/>
-                <a:cs typeface="Courier New" panose="02070309020205020404" pitchFamily="49" charset="0"/>
-              </a:rPr>
-              <a:t>- Since union can only be called on two disconnected sets it ensures that no loops will be formed. When a valid union is found it means the edge connecting those two trees is valid.</a:t>
-            </a:r>
-          </a:p>
-          <a:p>
-            <a:r>
-              <a:rPr lang="en-US" b="1" dirty="0">
-                <a:latin typeface="Courier New" panose="02070309020205020404" pitchFamily="49" charset="0"/>
-                <a:cs typeface="Courier New" panose="02070309020205020404" pitchFamily="49" charset="0"/>
-              </a:rPr>
-              <a:t>- The find operation runs in near constant time, O(</a:t>
-            </a:r>
-            <a:r>
-              <a:rPr lang="el-GR" b="1" dirty="0">
-                <a:latin typeface="Courier New" panose="02070309020205020404" pitchFamily="49" charset="0"/>
-                <a:cs typeface="Courier New" panose="02070309020205020404" pitchFamily="49" charset="0"/>
-              </a:rPr>
-              <a:t>α(</a:t>
-            </a:r>
-            <a:r>
-              <a:rPr lang="en-US" b="1" dirty="0">
-                <a:latin typeface="Courier New" panose="02070309020205020404" pitchFamily="49" charset="0"/>
-                <a:cs typeface="Courier New" panose="02070309020205020404" pitchFamily="49" charset="0"/>
-              </a:rPr>
-              <a:t>n).</a:t>
-            </a:r>
-            <a:br>
-              <a:rPr lang="en-US" b="1" dirty="0">
-                <a:latin typeface="Courier New" panose="02070309020205020404" pitchFamily="49" charset="0"/>
-                <a:cs typeface="Courier New" panose="02070309020205020404" pitchFamily="49" charset="0"/>
-              </a:rPr>
-            </a:br>
-            <a:br>
-              <a:rPr lang="en-US" b="1" dirty="0">
-                <a:latin typeface="Courier New" panose="02070309020205020404" pitchFamily="49" charset="0"/>
-                <a:cs typeface="Courier New" panose="02070309020205020404" pitchFamily="49" charset="0"/>
-              </a:rPr>
-            </a:br>
-            <a:r>
-              <a:rPr lang="en-US" sz="1100" b="1" dirty="0">
-                <a:latin typeface="Courier New" panose="02070309020205020404" pitchFamily="49" charset="0"/>
-                <a:cs typeface="Courier New" panose="02070309020205020404" pitchFamily="49" charset="0"/>
-              </a:rPr>
-              <a:t>(</a:t>
-            </a:r>
-            <a:r>
-              <a:rPr lang="el-GR" sz="1100" b="1" dirty="0">
-                <a:latin typeface="Courier New" panose="02070309020205020404" pitchFamily="49" charset="0"/>
-                <a:cs typeface="Courier New" panose="02070309020205020404" pitchFamily="49" charset="0"/>
-              </a:rPr>
-              <a:t>α</a:t>
-            </a:r>
-            <a:r>
-              <a:rPr lang="en-US" sz="1100" b="1" dirty="0">
-                <a:latin typeface="Courier New" panose="02070309020205020404" pitchFamily="49" charset="0"/>
-                <a:cs typeface="Courier New" panose="02070309020205020404" pitchFamily="49" charset="0"/>
-              </a:rPr>
-              <a:t> being the inverse Ackermann function)</a:t>
-            </a:r>
-            <a:endParaRPr lang="en-US" b="1" dirty="0">
-              <a:latin typeface="Courier New" panose="02070309020205020404" pitchFamily="49" charset="0"/>
-              <a:cs typeface="Courier New" panose="02070309020205020404" pitchFamily="49" charset="0"/>
-            </a:endParaRPr>
-          </a:p>
-        </p:txBody>
-      </p:sp>
-      <p:sp>
-        <p:nvSpPr>
-          <p:cNvPr id="9" name="TextBox 8">
-            <a:extLst>
-              <a:ext uri="{FF2B5EF4-FFF2-40B4-BE49-F238E27FC236}">
-                <a16:creationId xmlns:a16="http://schemas.microsoft.com/office/drawing/2014/main" id="{90D11E4A-806D-12DE-477E-C0BBF40BA4D0}"/>
-              </a:ext>
-            </a:extLst>
-          </p:cNvPr>
-          <p:cNvSpPr txBox="1"/>
-          <p:nvPr/>
-        </p:nvSpPr>
-        <p:spPr>
-          <a:xfrm>
-            <a:off x="0" y="6594047"/>
-            <a:ext cx="6753225" cy="261610"/>
-          </a:xfrm>
-          <a:prstGeom prst="rect">
-            <a:avLst/>
-          </a:prstGeom>
-          <a:noFill/>
-        </p:spPr>
-        <p:txBody>
-          <a:bodyPr wrap="square" rtlCol="0">
-            <a:spAutoFit/>
-          </a:bodyPr>
-          <a:lstStyle/>
-          <a:p>
-            <a:r>
-              <a:rPr lang="en-US" sz="1100" dirty="0">
-                <a:hlinkClick r:id="rId2"/>
-              </a:rPr>
-              <a:t>https://en.wikipedia.org/wiki/Disjoint-set_data_structure</a:t>
-            </a:r>
-            <a:endParaRPr lang="en-US" sz="1100" dirty="0"/>
-          </a:p>
-        </p:txBody>
-      </p:sp>
-    </p:spTree>
-    <p:extLst>
-      <p:ext uri="{BB962C8B-B14F-4D97-AF65-F5344CB8AC3E}">
-        <p14:creationId xmlns:p14="http://schemas.microsoft.com/office/powerpoint/2010/main" val="3542287999"/>
-      </p:ext>
-    </p:extLst>
-  </p:cSld>
-  <p:clrMapOvr>
-    <a:masterClrMapping/>
-  </p:clrMapOvr>
-</p:sld>
-</file>
-
-<file path=ppt/slides/slide8.xml><?xml version="1.0" encoding="utf-8"?>
-<p:sld xmlns:a="http://schemas.openxmlformats.org/drawingml/2006/main" xmlns:r="http://schemas.openxmlformats.org/officeDocument/2006/relationships" xmlns:p="http://schemas.openxmlformats.org/presentationml/2006/main">
-  <p:cSld>
-    <p:spTree>
-      <p:nvGrpSpPr>
-        <p:cNvPr id="1" name=""/>
-        <p:cNvGrpSpPr/>
-        <p:nvPr/>
-      </p:nvGrpSpPr>
-      <p:grpSpPr>
-        <a:xfrm>
-          <a:off x="0" y="0"/>
-          <a:ext cx="0" cy="0"/>
-          <a:chOff x="0" y="0"/>
-          <a:chExt cx="0" cy="0"/>
-        </a:xfrm>
-      </p:grpSpPr>
-      <p:sp>
-        <p:nvSpPr>
-          <p:cNvPr id="2" name="Title 1">
-            <a:extLst>
-              <a:ext uri="{FF2B5EF4-FFF2-40B4-BE49-F238E27FC236}">
-                <a16:creationId xmlns:a16="http://schemas.microsoft.com/office/drawing/2014/main" id="{1AF53A6C-0830-FF2E-C7B4-1A4812A59603}"/>
-              </a:ext>
-            </a:extLst>
-          </p:cNvPr>
-          <p:cNvSpPr>
-            <a:spLocks noGrp="1"/>
-          </p:cNvSpPr>
-          <p:nvPr>
-            <p:ph type="title"/>
-          </p:nvPr>
-        </p:nvSpPr>
-        <p:spPr/>
-        <p:txBody>
-          <a:bodyPr/>
-          <a:lstStyle/>
-          <a:p>
-            <a:r>
-              <a:rPr lang="en-US" b="1" dirty="0">
-                <a:latin typeface="Courier New" panose="02070309020205020404" pitchFamily="49" charset="0"/>
-                <a:cs typeface="Courier New" panose="02070309020205020404" pitchFamily="49" charset="0"/>
-              </a:rPr>
-              <a:t>GitHub repository &amp; Sources</a:t>
-            </a:r>
-          </a:p>
-        </p:txBody>
-      </p:sp>
-      <p:cxnSp>
-        <p:nvCxnSpPr>
-          <p:cNvPr id="4" name="Straight Connector 3">
-            <a:extLst>
-              <a:ext uri="{FF2B5EF4-FFF2-40B4-BE49-F238E27FC236}">
-                <a16:creationId xmlns:a16="http://schemas.microsoft.com/office/drawing/2014/main" id="{94B7F427-C3E0-F420-5795-5B77230EB33F}"/>
-              </a:ext>
-            </a:extLst>
-          </p:cNvPr>
-          <p:cNvCxnSpPr/>
-          <p:nvPr/>
-        </p:nvCxnSpPr>
-        <p:spPr>
-          <a:xfrm>
-            <a:off x="838200" y="1320798"/>
-            <a:ext cx="10515600" cy="0"/>
-          </a:xfrm>
-          <a:prstGeom prst="line">
-            <a:avLst/>
-          </a:prstGeom>
-          <a:ln w="44450"/>
-        </p:spPr>
-        <p:style>
-          <a:lnRef idx="2">
-            <a:schemeClr val="dk1"/>
-          </a:lnRef>
-          <a:fillRef idx="0">
-            <a:schemeClr val="dk1"/>
-          </a:fillRef>
-          <a:effectRef idx="1">
-            <a:schemeClr val="dk1"/>
-          </a:effectRef>
-          <a:fontRef idx="minor">
-            <a:schemeClr val="tx1"/>
-          </a:fontRef>
-        </p:style>
-      </p:cxnSp>
-      <p:sp>
-        <p:nvSpPr>
           <p:cNvPr id="5" name="TextBox 4">
             <a:extLst>
               <a:ext uri="{FF2B5EF4-FFF2-40B4-BE49-F238E27FC236}">
@@ -8752,7 +9427,7 @@
             </a:r>
             <a:r>
               <a:rPr lang="en-US" dirty="0">
-                <a:hlinkClick r:id="rId2"/>
+                <a:hlinkClick r:id="rId3"/>
               </a:rPr>
               <a:t>https://github.com/ShaunJae/CIS112Final</a:t>
             </a:r>
@@ -8794,7 +9469,7 @@
             </a:r>
             <a:r>
               <a:rPr lang="en-US" dirty="0">
-                <a:hlinkClick r:id="rId3"/>
+                <a:hlinkClick r:id="rId4"/>
               </a:rPr>
               <a:t>https://www.glassdoor.com/Interview/Implement-kruskal-s-algorithm-in-about-30-minutes-QTN_1966985.htm</a:t>
             </a:r>
@@ -8807,7 +9482,7 @@
             </a:r>
             <a:r>
               <a:rPr lang="en-US" dirty="0">
-                <a:hlinkClick r:id="rId4"/>
+                <a:hlinkClick r:id="rId5"/>
               </a:rPr>
               <a:t>https://en.wikipedia.org/wiki/Minimum_spanning_tree#Algorithms</a:t>
             </a:r>
@@ -8820,7 +9495,7 @@
             </a:r>
             <a:r>
               <a:rPr lang="en-US" dirty="0">
-                <a:hlinkClick r:id="rId5"/>
+                <a:hlinkClick r:id="rId6"/>
               </a:rPr>
               <a:t>https://en.wikipedia.org/wiki/Kruskal's_algorithm</a:t>
             </a:r>
@@ -8833,7 +9508,7 @@
             </a:r>
             <a:r>
               <a:rPr lang="en-US" dirty="0">
-                <a:hlinkClick r:id="rId6"/>
+                <a:hlinkClick r:id="rId7"/>
               </a:rPr>
               <a:t>https://en.wikipedia.org/wiki/Disjoint-set_data_structure</a:t>
             </a:r>
